--- a/proposals/2026-12_nmk-museum-web-maint/nmk_발표자료.pptx
+++ b/proposals/2026-12_nmk-museum-web-maint/nmk_발표자료.pptx
@@ -10912,7 +10912,7 @@
                 <a:ea typeface="맑은 고딕"/>
                 <a:cs typeface="맑은 고딕"/>
               </a:rPr>
-              <a:t>만족도 조사 연 1회 · 모니터링단 연 2회 · 13개 접근성 인증 · DB 표준화 연 1회</a:t>
+              <a:t>만족도 조사 연 1회 · 모니터링단 연 2회 · 13개 WA 품질마크 · DB 표준화 연 1회</a:t>
             </a:r>
             <a:r>
               <a:rPr sz="1350" b="1">
@@ -11435,7 +11435,7 @@
                 <a:ea typeface="맑은 고딕"/>
                 <a:cs typeface="맑은 고딕"/>
               </a:rPr>
-              <a:t>웹 접근성 인증</a:t>
+              <a:t>WA 품질마크</a:t>
             </a:r>
           </a:p>
         </p:txBody>
@@ -11554,7 +11554,7 @@
                 <a:ea typeface="맑은 고딕"/>
                 <a:cs typeface="맑은 고딕"/>
               </a:rPr>
-              <a:t>만료 3개월 전 착수</a:t>
+              <a:t>모바일 접근성 진단 · 보완</a:t>
             </a:r>
           </a:p>
         </p:txBody>
@@ -12541,15 +12541,875 @@
           </a:p>
         </p:txBody>
       </p:sp>
-      <p:sp>
-        <p:nvSpPr>
-          <p:cNvPr id="42" name="Rectangle 41"/>
+      <p:graphicFrame>
+        <p:nvGraphicFramePr>
+          <p:cNvPr id="42" name="Table 41"/>
+          <p:cNvGraphicFramePr>
+            <a:graphicFrameLocks noGrp="1"/>
+          </p:cNvGraphicFramePr>
+          <p:nvPr/>
+        </p:nvGraphicFramePr>
+        <p:xfrm>
+          <a:off x="6177600" y="2507622"/>
+          <a:ext cx="5691598" cy="2730106"/>
+        </p:xfrm>
+        <a:graphic>
+          <a:graphicData uri="http://schemas.openxmlformats.org/drawingml/2006/table">
+            <a:tbl>
+              <a:tblPr firstRow="0" bandRow="0"/>
+              <a:tblGrid>
+                <a:gridCol w="1766358"/>
+                <a:gridCol w="1471965"/>
+                <a:gridCol w="2453275"/>
+              </a:tblGrid>
+              <a:tr h="472950">
+                <a:tc>
+                  <a:txBody>
+                    <a:bodyPr wrap="square"/>
+                    <a:lstStyle/>
+                    <a:p>
+                      <a:pPr algn="ctr">
+                        <a:lnSpc>
+                          <a:spcPct val="110000"/>
+                        </a:lnSpc>
+                        <a:spcBef>
+                          <a:spcPts val="0"/>
+                        </a:spcBef>
+                        <a:spcAft>
+                          <a:spcPts val="0"/>
+                        </a:spcAft>
+                      </a:pPr>
+                      <a:r>
+                        <a:rPr sz="1207" b="1">
+                          <a:solidFill>
+                            <a:srgbClr val="FFFFFF"/>
+                          </a:solidFill>
+                          <a:latin typeface="맑은 고딕"/>
+                          <a:ea typeface="맑은 고딕"/>
+                          <a:cs typeface="맑은 고딕"/>
+                        </a:rPr>
+                        <a:t>활동</a:t>
+                      </a:r>
+                    </a:p>
+                  </a:txBody>
+                  <a:tcPr marL="43200" marR="43200" marT="14400" marB="14400" anchor="ctr">
+                    <a:lnL w="9525">
+                      <a:solidFill>
+                        <a:srgbClr val="BFC8D6"/>
+                      </a:solidFill>
+                    </a:lnL>
+                    <a:lnR w="9525">
+                      <a:solidFill>
+                        <a:srgbClr val="BFC8D6"/>
+                      </a:solidFill>
+                    </a:lnR>
+                    <a:lnT w="9525">
+                      <a:solidFill>
+                        <a:srgbClr val="BFC8D6"/>
+                      </a:solidFill>
+                    </a:lnT>
+                    <a:lnB w="9525">
+                      <a:solidFill>
+                        <a:srgbClr val="BFC8D6"/>
+                      </a:solidFill>
+                    </a:lnB>
+                    <a:solidFill>
+                      <a:srgbClr val="1F5FD1"/>
+                    </a:solidFill>
+                  </a:tcPr>
+                </a:tc>
+                <a:tc>
+                  <a:txBody>
+                    <a:bodyPr wrap="square"/>
+                    <a:lstStyle/>
+                    <a:p>
+                      <a:pPr algn="ctr">
+                        <a:lnSpc>
+                          <a:spcPct val="110000"/>
+                        </a:lnSpc>
+                        <a:spcBef>
+                          <a:spcPts val="0"/>
+                        </a:spcBef>
+                        <a:spcAft>
+                          <a:spcPts val="0"/>
+                        </a:spcAft>
+                      </a:pPr>
+                      <a:r>
+                        <a:rPr sz="1207" b="1">
+                          <a:solidFill>
+                            <a:srgbClr val="FFFFFF"/>
+                          </a:solidFill>
+                          <a:latin typeface="맑은 고딕"/>
+                          <a:ea typeface="맑은 고딕"/>
+                          <a:cs typeface="맑은 고딕"/>
+                        </a:rPr>
+                        <a:t>시기</a:t>
+                      </a:r>
+                    </a:p>
+                  </a:txBody>
+                  <a:tcPr marL="43200" marR="43200" marT="14400" marB="14400" anchor="ctr">
+                    <a:lnL w="9525">
+                      <a:solidFill>
+                        <a:srgbClr val="BFC8D6"/>
+                      </a:solidFill>
+                    </a:lnL>
+                    <a:lnR w="9525">
+                      <a:solidFill>
+                        <a:srgbClr val="BFC8D6"/>
+                      </a:solidFill>
+                    </a:lnR>
+                    <a:lnT w="9525">
+                      <a:solidFill>
+                        <a:srgbClr val="BFC8D6"/>
+                      </a:solidFill>
+                    </a:lnT>
+                    <a:lnB w="9525">
+                      <a:solidFill>
+                        <a:srgbClr val="BFC8D6"/>
+                      </a:solidFill>
+                    </a:lnB>
+                    <a:solidFill>
+                      <a:srgbClr val="1F5FD1"/>
+                    </a:solidFill>
+                  </a:tcPr>
+                </a:tc>
+                <a:tc>
+                  <a:txBody>
+                    <a:bodyPr wrap="square"/>
+                    <a:lstStyle/>
+                    <a:p>
+                      <a:pPr algn="ctr">
+                        <a:lnSpc>
+                          <a:spcPct val="110000"/>
+                        </a:lnSpc>
+                        <a:spcBef>
+                          <a:spcPts val="0"/>
+                        </a:spcBef>
+                        <a:spcAft>
+                          <a:spcPts val="0"/>
+                        </a:spcAft>
+                      </a:pPr>
+                      <a:r>
+                        <a:rPr sz="1207" b="1">
+                          <a:solidFill>
+                            <a:srgbClr val="FFFFFF"/>
+                          </a:solidFill>
+                          <a:latin typeface="맑은 고딕"/>
+                          <a:ea typeface="맑은 고딕"/>
+                          <a:cs typeface="맑은 고딕"/>
+                        </a:rPr>
+                        <a:t>결과</a:t>
+                      </a:r>
+                    </a:p>
+                  </a:txBody>
+                  <a:tcPr marL="43200" marR="43200" marT="14400" marB="14400" anchor="ctr">
+                    <a:lnL w="9525">
+                      <a:solidFill>
+                        <a:srgbClr val="BFC8D6"/>
+                      </a:solidFill>
+                    </a:lnL>
+                    <a:lnR w="9525">
+                      <a:solidFill>
+                        <a:srgbClr val="BFC8D6"/>
+                      </a:solidFill>
+                    </a:lnR>
+                    <a:lnT w="9525">
+                      <a:solidFill>
+                        <a:srgbClr val="BFC8D6"/>
+                      </a:solidFill>
+                    </a:lnT>
+                    <a:lnB w="9525">
+                      <a:solidFill>
+                        <a:srgbClr val="BFC8D6"/>
+                      </a:solidFill>
+                    </a:lnB>
+                    <a:solidFill>
+                      <a:srgbClr val="1F5FD1"/>
+                    </a:solidFill>
+                  </a:tcPr>
+                </a:tc>
+              </a:tr>
+              <a:tr h="655628">
+                <a:tc>
+                  <a:txBody>
+                    <a:bodyPr wrap="square"/>
+                    <a:lstStyle/>
+                    <a:p>
+                      <a:pPr algn="ctr">
+                        <a:lnSpc>
+                          <a:spcPct val="110000"/>
+                        </a:lnSpc>
+                        <a:spcBef>
+                          <a:spcPts val="0"/>
+                        </a:spcBef>
+                        <a:spcAft>
+                          <a:spcPts val="0"/>
+                        </a:spcAft>
+                      </a:pPr>
+                      <a:r>
+                        <a:rPr sz="1150" b="1">
+                          <a:solidFill>
+                            <a:srgbClr val="222222"/>
+                          </a:solidFill>
+                          <a:latin typeface="맑은 고딕"/>
+                          <a:ea typeface="맑은 고딕"/>
+                          <a:cs typeface="맑은 고딕"/>
+                        </a:rPr>
+                        <a:t>모니터링단 1 · 2차</a:t>
+                      </a:r>
+                    </a:p>
+                  </a:txBody>
+                  <a:tcPr marL="43200" marR="43200" marT="14400" marB="14400" anchor="ctr">
+                    <a:lnL w="9525">
+                      <a:solidFill>
+                        <a:srgbClr val="BFC8D6"/>
+                      </a:solidFill>
+                    </a:lnL>
+                    <a:lnR w="9525">
+                      <a:solidFill>
+                        <a:srgbClr val="BFC8D6"/>
+                      </a:solidFill>
+                    </a:lnR>
+                    <a:lnT w="9525">
+                      <a:solidFill>
+                        <a:srgbClr val="BFC8D6"/>
+                      </a:solidFill>
+                    </a:lnT>
+                    <a:lnB w="9525">
+                      <a:solidFill>
+                        <a:srgbClr val="BFC8D6"/>
+                      </a:solidFill>
+                    </a:lnB>
+                    <a:solidFill>
+                      <a:srgbClr val="EEF3FB"/>
+                    </a:solidFill>
+                  </a:tcPr>
+                </a:tc>
+                <a:tc>
+                  <a:txBody>
+                    <a:bodyPr wrap="square"/>
+                    <a:lstStyle/>
+                    <a:p>
+                      <a:pPr algn="ctr">
+                        <a:lnSpc>
+                          <a:spcPct val="110000"/>
+                        </a:lnSpc>
+                        <a:spcBef>
+                          <a:spcPts val="0"/>
+                        </a:spcBef>
+                        <a:spcAft>
+                          <a:spcPts val="0"/>
+                        </a:spcAft>
+                      </a:pPr>
+                      <a:r>
+                        <a:rPr sz="1150" b="0">
+                          <a:solidFill>
+                            <a:srgbClr val="222222"/>
+                          </a:solidFill>
+                          <a:latin typeface="맑은 고딕"/>
+                          <a:ea typeface="맑은 고딕"/>
+                          <a:cs typeface="맑은 고딕"/>
+                        </a:rPr>
+                        <a:t>4 ~ 5월 · 10 ~ 11월</a:t>
+                      </a:r>
+                    </a:p>
+                  </a:txBody>
+                  <a:tcPr marL="43200" marR="43200" marT="14400" marB="14400" anchor="ctr">
+                    <a:lnL w="9525">
+                      <a:solidFill>
+                        <a:srgbClr val="BFC8D6"/>
+                      </a:solidFill>
+                    </a:lnL>
+                    <a:lnR w="9525">
+                      <a:solidFill>
+                        <a:srgbClr val="BFC8D6"/>
+                      </a:solidFill>
+                    </a:lnR>
+                    <a:lnT w="9525">
+                      <a:solidFill>
+                        <a:srgbClr val="BFC8D6"/>
+                      </a:solidFill>
+                    </a:lnT>
+                    <a:lnB w="9525">
+                      <a:solidFill>
+                        <a:srgbClr val="BFC8D6"/>
+                      </a:solidFill>
+                    </a:lnB>
+                    <a:solidFill>
+                      <a:srgbClr val="FFFFFF"/>
+                    </a:solidFill>
+                  </a:tcPr>
+                </a:tc>
+                <a:tc>
+                  <a:txBody>
+                    <a:bodyPr wrap="square"/>
+                    <a:lstStyle/>
+                    <a:p>
+                      <a:pPr algn="l">
+                        <a:lnSpc>
+                          <a:spcPct val="110000"/>
+                        </a:lnSpc>
+                        <a:spcBef>
+                          <a:spcPts val="0"/>
+                        </a:spcBef>
+                        <a:spcAft>
+                          <a:spcPts val="0"/>
+                        </a:spcAft>
+                      </a:pPr>
+                      <a:r>
+                        <a:rPr sz="1150" b="0">
+                          <a:solidFill>
+                            <a:srgbClr val="222222"/>
+                          </a:solidFill>
+                          <a:latin typeface="맑은 고딕"/>
+                          <a:ea typeface="맑은 고딕"/>
+                          <a:cs typeface="맑은 고딕"/>
+                        </a:rPr>
+                        <a:t>유형별 조치 · 분기 보고</a:t>
+                      </a:r>
+                    </a:p>
+                  </a:txBody>
+                  <a:tcPr marL="43200" marR="43200" marT="14400" marB="14400" anchor="ctr">
+                    <a:lnL w="9525">
+                      <a:solidFill>
+                        <a:srgbClr val="BFC8D6"/>
+                      </a:solidFill>
+                    </a:lnL>
+                    <a:lnR w="9525">
+                      <a:solidFill>
+                        <a:srgbClr val="BFC8D6"/>
+                      </a:solidFill>
+                    </a:lnR>
+                    <a:lnT w="9525">
+                      <a:solidFill>
+                        <a:srgbClr val="BFC8D6"/>
+                      </a:solidFill>
+                    </a:lnT>
+                    <a:lnB w="9525">
+                      <a:solidFill>
+                        <a:srgbClr val="BFC8D6"/>
+                      </a:solidFill>
+                    </a:lnB>
+                    <a:solidFill>
+                      <a:srgbClr val="FFFFFF"/>
+                    </a:solidFill>
+                  </a:tcPr>
+                </a:tc>
+              </a:tr>
+              <a:tr h="472950">
+                <a:tc>
+                  <a:txBody>
+                    <a:bodyPr wrap="square"/>
+                    <a:lstStyle/>
+                    <a:p>
+                      <a:pPr algn="ctr">
+                        <a:lnSpc>
+                          <a:spcPct val="110000"/>
+                        </a:lnSpc>
+                        <a:spcBef>
+                          <a:spcPts val="0"/>
+                        </a:spcBef>
+                        <a:spcAft>
+                          <a:spcPts val="0"/>
+                        </a:spcAft>
+                      </a:pPr>
+                      <a:r>
+                        <a:rPr sz="1150" b="1">
+                          <a:solidFill>
+                            <a:srgbClr val="222222"/>
+                          </a:solidFill>
+                          <a:latin typeface="맑은 고딕"/>
+                          <a:ea typeface="맑은 고딕"/>
+                          <a:cs typeface="맑은 고딕"/>
+                        </a:rPr>
+                        <a:t>이용자 만족도 조사</a:t>
+                      </a:r>
+                    </a:p>
+                  </a:txBody>
+                  <a:tcPr marL="43200" marR="43200" marT="14400" marB="14400" anchor="ctr">
+                    <a:lnL w="9525">
+                      <a:solidFill>
+                        <a:srgbClr val="BFC8D6"/>
+                      </a:solidFill>
+                    </a:lnL>
+                    <a:lnR w="9525">
+                      <a:solidFill>
+                        <a:srgbClr val="BFC8D6"/>
+                      </a:solidFill>
+                    </a:lnR>
+                    <a:lnT w="9525">
+                      <a:solidFill>
+                        <a:srgbClr val="BFC8D6"/>
+                      </a:solidFill>
+                    </a:lnT>
+                    <a:lnB w="9525">
+                      <a:solidFill>
+                        <a:srgbClr val="BFC8D6"/>
+                      </a:solidFill>
+                    </a:lnB>
+                    <a:solidFill>
+                      <a:srgbClr val="EEF3FB"/>
+                    </a:solidFill>
+                  </a:tcPr>
+                </a:tc>
+                <a:tc>
+                  <a:txBody>
+                    <a:bodyPr wrap="square"/>
+                    <a:lstStyle/>
+                    <a:p>
+                      <a:pPr algn="ctr">
+                        <a:lnSpc>
+                          <a:spcPct val="110000"/>
+                        </a:lnSpc>
+                        <a:spcBef>
+                          <a:spcPts val="0"/>
+                        </a:spcBef>
+                        <a:spcAft>
+                          <a:spcPts val="0"/>
+                        </a:spcAft>
+                      </a:pPr>
+                      <a:r>
+                        <a:rPr sz="1150" b="0">
+                          <a:solidFill>
+                            <a:srgbClr val="222222"/>
+                          </a:solidFill>
+                          <a:latin typeface="맑은 고딕"/>
+                          <a:ea typeface="맑은 고딕"/>
+                          <a:cs typeface="맑은 고딕"/>
+                        </a:rPr>
+                        <a:t>9 ~ 10월</a:t>
+                      </a:r>
+                    </a:p>
+                  </a:txBody>
+                  <a:tcPr marL="43200" marR="43200" marT="14400" marB="14400" anchor="ctr">
+                    <a:lnL w="9525">
+                      <a:solidFill>
+                        <a:srgbClr val="BFC8D6"/>
+                      </a:solidFill>
+                    </a:lnL>
+                    <a:lnR w="9525">
+                      <a:solidFill>
+                        <a:srgbClr val="BFC8D6"/>
+                      </a:solidFill>
+                    </a:lnR>
+                    <a:lnT w="9525">
+                      <a:solidFill>
+                        <a:srgbClr val="BFC8D6"/>
+                      </a:solidFill>
+                    </a:lnT>
+                    <a:lnB w="9525">
+                      <a:solidFill>
+                        <a:srgbClr val="BFC8D6"/>
+                      </a:solidFill>
+                    </a:lnB>
+                    <a:solidFill>
+                      <a:srgbClr val="FFFFFF"/>
+                    </a:solidFill>
+                  </a:tcPr>
+                </a:tc>
+                <a:tc>
+                  <a:txBody>
+                    <a:bodyPr wrap="square"/>
+                    <a:lstStyle/>
+                    <a:p>
+                      <a:pPr algn="l">
+                        <a:lnSpc>
+                          <a:spcPct val="110000"/>
+                        </a:lnSpc>
+                        <a:spcBef>
+                          <a:spcPts val="0"/>
+                        </a:spcBef>
+                        <a:spcAft>
+                          <a:spcPts val="0"/>
+                        </a:spcAft>
+                      </a:pPr>
+                      <a:r>
+                        <a:rPr sz="1150" b="0">
+                          <a:solidFill>
+                            <a:srgbClr val="222222"/>
+                          </a:solidFill>
+                          <a:latin typeface="맑은 고딕"/>
+                          <a:ea typeface="맑은 고딕"/>
+                          <a:cs typeface="맑은 고딕"/>
+                        </a:rPr>
+                        <a:t>기관별 분석 · 개선 계획</a:t>
+                      </a:r>
+                    </a:p>
+                  </a:txBody>
+                  <a:tcPr marL="43200" marR="43200" marT="14400" marB="14400" anchor="ctr">
+                    <a:lnL w="9525">
+                      <a:solidFill>
+                        <a:srgbClr val="BFC8D6"/>
+                      </a:solidFill>
+                    </a:lnL>
+                    <a:lnR w="9525">
+                      <a:solidFill>
+                        <a:srgbClr val="BFC8D6"/>
+                      </a:solidFill>
+                    </a:lnR>
+                    <a:lnT w="9525">
+                      <a:solidFill>
+                        <a:srgbClr val="BFC8D6"/>
+                      </a:solidFill>
+                    </a:lnT>
+                    <a:lnB w="9525">
+                      <a:solidFill>
+                        <a:srgbClr val="BFC8D6"/>
+                      </a:solidFill>
+                    </a:lnB>
+                    <a:solidFill>
+                      <a:srgbClr val="FFFFFF"/>
+                    </a:solidFill>
+                  </a:tcPr>
+                </a:tc>
+              </a:tr>
+              <a:tr h="655628">
+                <a:tc>
+                  <a:txBody>
+                    <a:bodyPr wrap="square"/>
+                    <a:lstStyle/>
+                    <a:p>
+                      <a:pPr algn="ctr">
+                        <a:lnSpc>
+                          <a:spcPct val="110000"/>
+                        </a:lnSpc>
+                        <a:spcBef>
+                          <a:spcPts val="0"/>
+                        </a:spcBef>
+                        <a:spcAft>
+                          <a:spcPts val="0"/>
+                        </a:spcAft>
+                      </a:pPr>
+                      <a:r>
+                        <a:rPr sz="1150" b="1">
+                          <a:solidFill>
+                            <a:srgbClr val="222222"/>
+                          </a:solidFill>
+                          <a:latin typeface="맑은 고딕"/>
+                          <a:ea typeface="맑은 고딕"/>
+                          <a:cs typeface="맑은 고딕"/>
+                        </a:rPr>
+                        <a:t>WA 품질마크 · 모바일</a:t>
+                      </a:r>
+                    </a:p>
+                  </a:txBody>
+                  <a:tcPr marL="43200" marR="43200" marT="14400" marB="14400" anchor="ctr">
+                    <a:lnL w="9525">
+                      <a:solidFill>
+                        <a:srgbClr val="BFC8D6"/>
+                      </a:solidFill>
+                    </a:lnL>
+                    <a:lnR w="9525">
+                      <a:solidFill>
+                        <a:srgbClr val="BFC8D6"/>
+                      </a:solidFill>
+                    </a:lnR>
+                    <a:lnT w="9525">
+                      <a:solidFill>
+                        <a:srgbClr val="BFC8D6"/>
+                      </a:solidFill>
+                    </a:lnT>
+                    <a:lnB w="9525">
+                      <a:solidFill>
+                        <a:srgbClr val="BFC8D6"/>
+                      </a:solidFill>
+                    </a:lnB>
+                    <a:solidFill>
+                      <a:srgbClr val="EEF3FB"/>
+                    </a:solidFill>
+                  </a:tcPr>
+                </a:tc>
+                <a:tc>
+                  <a:txBody>
+                    <a:bodyPr wrap="square"/>
+                    <a:lstStyle/>
+                    <a:p>
+                      <a:pPr algn="ctr">
+                        <a:lnSpc>
+                          <a:spcPct val="110000"/>
+                        </a:lnSpc>
+                        <a:spcBef>
+                          <a:spcPts val="0"/>
+                        </a:spcBef>
+                        <a:spcAft>
+                          <a:spcPts val="0"/>
+                        </a:spcAft>
+                      </a:pPr>
+                      <a:r>
+                        <a:rPr sz="1150" b="0">
+                          <a:solidFill>
+                            <a:srgbClr val="222222"/>
+                          </a:solidFill>
+                          <a:latin typeface="맑은 고딕"/>
+                          <a:ea typeface="맑은 고딕"/>
+                          <a:cs typeface="맑은 고딕"/>
+                        </a:rPr>
+                        <a:t>만료 3개월 전 · 연 1회</a:t>
+                      </a:r>
+                    </a:p>
+                  </a:txBody>
+                  <a:tcPr marL="43200" marR="43200" marT="14400" marB="14400" anchor="ctr">
+                    <a:lnL w="9525">
+                      <a:solidFill>
+                        <a:srgbClr val="BFC8D6"/>
+                      </a:solidFill>
+                    </a:lnL>
+                    <a:lnR w="9525">
+                      <a:solidFill>
+                        <a:srgbClr val="BFC8D6"/>
+                      </a:solidFill>
+                    </a:lnR>
+                    <a:lnT w="9525">
+                      <a:solidFill>
+                        <a:srgbClr val="BFC8D6"/>
+                      </a:solidFill>
+                    </a:lnT>
+                    <a:lnB w="9525">
+                      <a:solidFill>
+                        <a:srgbClr val="BFC8D6"/>
+                      </a:solidFill>
+                    </a:lnB>
+                    <a:solidFill>
+                      <a:srgbClr val="FFFFFF"/>
+                    </a:solidFill>
+                  </a:tcPr>
+                </a:tc>
+                <a:tc>
+                  <a:txBody>
+                    <a:bodyPr wrap="square"/>
+                    <a:lstStyle/>
+                    <a:p>
+                      <a:pPr algn="l">
+                        <a:lnSpc>
+                          <a:spcPct val="110000"/>
+                        </a:lnSpc>
+                        <a:spcBef>
+                          <a:spcPts val="0"/>
+                        </a:spcBef>
+                        <a:spcAft>
+                          <a:spcPts val="0"/>
+                        </a:spcAft>
+                      </a:pPr>
+                      <a:r>
+                        <a:rPr sz="1150" b="0">
+                          <a:solidFill>
+                            <a:srgbClr val="222222"/>
+                          </a:solidFill>
+                          <a:latin typeface="맑은 고딕"/>
+                          <a:ea typeface="맑은 고딕"/>
+                          <a:cs typeface="맑은 고딕"/>
+                        </a:rPr>
+                        <a:t>진단 · 개선 · 인증 갱신</a:t>
+                      </a:r>
+                    </a:p>
+                  </a:txBody>
+                  <a:tcPr marL="43200" marR="43200" marT="14400" marB="14400" anchor="ctr">
+                    <a:lnL w="9525">
+                      <a:solidFill>
+                        <a:srgbClr val="BFC8D6"/>
+                      </a:solidFill>
+                    </a:lnL>
+                    <a:lnR w="9525">
+                      <a:solidFill>
+                        <a:srgbClr val="BFC8D6"/>
+                      </a:solidFill>
+                    </a:lnR>
+                    <a:lnT w="9525">
+                      <a:solidFill>
+                        <a:srgbClr val="BFC8D6"/>
+                      </a:solidFill>
+                    </a:lnT>
+                    <a:lnB w="9525">
+                      <a:solidFill>
+                        <a:srgbClr val="BFC8D6"/>
+                      </a:solidFill>
+                    </a:lnB>
+                    <a:solidFill>
+                      <a:srgbClr val="FFFFFF"/>
+                    </a:solidFill>
+                  </a:tcPr>
+                </a:tc>
+              </a:tr>
+              <a:tr h="472950">
+                <a:tc>
+                  <a:txBody>
+                    <a:bodyPr wrap="square"/>
+                    <a:lstStyle/>
+                    <a:p>
+                      <a:pPr algn="ctr">
+                        <a:lnSpc>
+                          <a:spcPct val="110000"/>
+                        </a:lnSpc>
+                        <a:spcBef>
+                          <a:spcPts val="0"/>
+                        </a:spcBef>
+                        <a:spcAft>
+                          <a:spcPts val="0"/>
+                        </a:spcAft>
+                      </a:pPr>
+                      <a:r>
+                        <a:rPr sz="1150" b="1">
+                          <a:solidFill>
+                            <a:srgbClr val="222222"/>
+                          </a:solidFill>
+                          <a:latin typeface="맑은 고딕"/>
+                          <a:ea typeface="맑은 고딕"/>
+                          <a:cs typeface="맑은 고딕"/>
+                        </a:rPr>
+                        <a:t>DB 표준화</a:t>
+                      </a:r>
+                    </a:p>
+                  </a:txBody>
+                  <a:tcPr marL="43200" marR="43200" marT="14400" marB="14400" anchor="ctr">
+                    <a:lnL w="9525">
+                      <a:solidFill>
+                        <a:srgbClr val="BFC8D6"/>
+                      </a:solidFill>
+                    </a:lnL>
+                    <a:lnR w="9525">
+                      <a:solidFill>
+                        <a:srgbClr val="BFC8D6"/>
+                      </a:solidFill>
+                    </a:lnR>
+                    <a:lnT w="9525">
+                      <a:solidFill>
+                        <a:srgbClr val="BFC8D6"/>
+                      </a:solidFill>
+                    </a:lnT>
+                    <a:lnB w="9525">
+                      <a:solidFill>
+                        <a:srgbClr val="BFC8D6"/>
+                      </a:solidFill>
+                    </a:lnB>
+                    <a:solidFill>
+                      <a:srgbClr val="EEF3FB"/>
+                    </a:solidFill>
+                  </a:tcPr>
+                </a:tc>
+                <a:tc>
+                  <a:txBody>
+                    <a:bodyPr wrap="square"/>
+                    <a:lstStyle/>
+                    <a:p>
+                      <a:pPr algn="ctr">
+                        <a:lnSpc>
+                          <a:spcPct val="110000"/>
+                        </a:lnSpc>
+                        <a:spcBef>
+                          <a:spcPts val="0"/>
+                        </a:spcBef>
+                        <a:spcAft>
+                          <a:spcPts val="0"/>
+                        </a:spcAft>
+                      </a:pPr>
+                      <a:r>
+                        <a:rPr sz="1150" b="0">
+                          <a:solidFill>
+                            <a:srgbClr val="222222"/>
+                          </a:solidFill>
+                          <a:latin typeface="맑은 고딕"/>
+                          <a:ea typeface="맑은 고딕"/>
+                          <a:cs typeface="맑은 고딕"/>
+                        </a:rPr>
+                        <a:t>7 ~ 8월</a:t>
+                      </a:r>
+                    </a:p>
+                  </a:txBody>
+                  <a:tcPr marL="43200" marR="43200" marT="14400" marB="14400" anchor="ctr">
+                    <a:lnL w="9525">
+                      <a:solidFill>
+                        <a:srgbClr val="BFC8D6"/>
+                      </a:solidFill>
+                    </a:lnL>
+                    <a:lnR w="9525">
+                      <a:solidFill>
+                        <a:srgbClr val="BFC8D6"/>
+                      </a:solidFill>
+                    </a:lnR>
+                    <a:lnT w="9525">
+                      <a:solidFill>
+                        <a:srgbClr val="BFC8D6"/>
+                      </a:solidFill>
+                    </a:lnT>
+                    <a:lnB w="9525">
+                      <a:solidFill>
+                        <a:srgbClr val="BFC8D6"/>
+                      </a:solidFill>
+                    </a:lnB>
+                    <a:solidFill>
+                      <a:srgbClr val="FFFFFF"/>
+                    </a:solidFill>
+                  </a:tcPr>
+                </a:tc>
+                <a:tc>
+                  <a:txBody>
+                    <a:bodyPr wrap="square"/>
+                    <a:lstStyle/>
+                    <a:p>
+                      <a:pPr algn="l">
+                        <a:lnSpc>
+                          <a:spcPct val="110000"/>
+                        </a:lnSpc>
+                        <a:spcBef>
+                          <a:spcPts val="0"/>
+                        </a:spcBef>
+                        <a:spcAft>
+                          <a:spcPts val="0"/>
+                        </a:spcAft>
+                      </a:pPr>
+                      <a:r>
+                        <a:rPr sz="1150" b="0">
+                          <a:solidFill>
+                            <a:srgbClr val="222222"/>
+                          </a:solidFill>
+                          <a:latin typeface="맑은 고딕"/>
+                          <a:ea typeface="맑은 고딕"/>
+                          <a:cs typeface="맑은 고딕"/>
+                        </a:rPr>
+                        <a:t>문체부 품질관리 대응</a:t>
+                      </a:r>
+                    </a:p>
+                  </a:txBody>
+                  <a:tcPr marL="43200" marR="43200" marT="14400" marB="14400" anchor="ctr">
+                    <a:lnL w="9525">
+                      <a:solidFill>
+                        <a:srgbClr val="BFC8D6"/>
+                      </a:solidFill>
+                    </a:lnL>
+                    <a:lnR w="9525">
+                      <a:solidFill>
+                        <a:srgbClr val="BFC8D6"/>
+                      </a:solidFill>
+                    </a:lnR>
+                    <a:lnT w="9525">
+                      <a:solidFill>
+                        <a:srgbClr val="BFC8D6"/>
+                      </a:solidFill>
+                    </a:lnT>
+                    <a:lnB w="9525">
+                      <a:solidFill>
+                        <a:srgbClr val="BFC8D6"/>
+                      </a:solidFill>
+                    </a:lnB>
+                    <a:solidFill>
+                      <a:srgbClr val="FFFFFF"/>
+                    </a:solidFill>
+                  </a:tcPr>
+                </a:tc>
+              </a:tr>
+            </a:tbl>
+          </a:graphicData>
+        </a:graphic>
+      </p:graphicFrame>
+      <p:sp>
+        <p:nvSpPr>
+          <p:cNvPr id="43" name="Rectangle 42"/>
           <p:cNvSpPr/>
           <p:nvPr/>
         </p:nvSpPr>
         <p:spPr>
           <a:xfrm>
-            <a:off x="6177600" y="2507622"/>
+            <a:off x="6177600" y="5345732"/>
             <a:ext cx="2791800" cy="720000"/>
           </a:xfrm>
           <a:prstGeom prst="rect">
@@ -12589,13 +13449,13 @@
       </p:sp>
       <p:sp>
         <p:nvSpPr>
-          <p:cNvPr id="43" name="TextBox 42"/>
+          <p:cNvPr id="44" name="TextBox 43"/>
           <p:cNvSpPr txBox="1"/>
           <p:nvPr/>
         </p:nvSpPr>
         <p:spPr>
           <a:xfrm>
-            <a:off x="6177600" y="2561622"/>
+            <a:off x="6177600" y="5399732"/>
             <a:ext cx="2791800" cy="468000"/>
           </a:xfrm>
           <a:prstGeom prst="rect">
@@ -12636,13 +13496,13 @@
       </p:sp>
       <p:sp>
         <p:nvSpPr>
-          <p:cNvPr id="44" name="TextBox 43"/>
+          <p:cNvPr id="45" name="TextBox 44"/>
           <p:cNvSpPr txBox="1"/>
           <p:nvPr/>
         </p:nvSpPr>
         <p:spPr>
           <a:xfrm>
-            <a:off x="6177600" y="3029622"/>
+            <a:off x="6177600" y="5867732"/>
             <a:ext cx="2791800" cy="180000"/>
           </a:xfrm>
           <a:prstGeom prst="rect">
@@ -12676,20 +13536,20 @@
                 <a:ea typeface="맑은 고딕"/>
                 <a:cs typeface="맑은 고딕"/>
               </a:rPr>
-              <a:t>접근성 인증 유지</a:t>
+              <a:t>WA 품질마크 유지</a:t>
             </a:r>
           </a:p>
         </p:txBody>
       </p:sp>
       <p:sp>
         <p:nvSpPr>
-          <p:cNvPr id="45" name="Rectangle 44"/>
+          <p:cNvPr id="46" name="Rectangle 45"/>
           <p:cNvSpPr/>
           <p:nvPr/>
         </p:nvSpPr>
         <p:spPr>
           <a:xfrm>
-            <a:off x="9077400" y="2507622"/>
+            <a:off x="9077400" y="5345732"/>
             <a:ext cx="2791800" cy="720000"/>
           </a:xfrm>
           <a:prstGeom prst="rect">
@@ -12729,13 +13589,13 @@
       </p:sp>
       <p:sp>
         <p:nvSpPr>
-          <p:cNvPr id="46" name="TextBox 45"/>
+          <p:cNvPr id="47" name="TextBox 46"/>
           <p:cNvSpPr txBox="1"/>
           <p:nvPr/>
         </p:nvSpPr>
         <p:spPr>
           <a:xfrm>
-            <a:off x="9077400" y="2561622"/>
+            <a:off x="9077400" y="5399732"/>
             <a:ext cx="2791800" cy="468000"/>
           </a:xfrm>
           <a:prstGeom prst="rect">
@@ -12776,13 +13636,13 @@
       </p:sp>
       <p:sp>
         <p:nvSpPr>
-          <p:cNvPr id="47" name="TextBox 46"/>
+          <p:cNvPr id="48" name="TextBox 47"/>
           <p:cNvSpPr txBox="1"/>
           <p:nvPr/>
         </p:nvSpPr>
         <p:spPr>
           <a:xfrm>
-            <a:off x="9077400" y="3029622"/>
+            <a:off x="9077400" y="5867732"/>
             <a:ext cx="2791800" cy="180000"/>
           </a:xfrm>
           <a:prstGeom prst="rect">
@@ -12823,7 +13683,7 @@
       </p:sp>
       <p:sp>
         <p:nvSpPr>
-          <p:cNvPr id="48" name="TextBox 47"/>
+          <p:cNvPr id="49" name="TextBox 48"/>
           <p:cNvSpPr txBox="1"/>
           <p:nvPr/>
         </p:nvSpPr>
